--- a/dittvin-cro-audit/dittvin-ecomhouse-pitch.pptx
+++ b/dittvin-cro-audit/dittvin-ecomhouse-pitch.pptx
@@ -37905,8 +37905,8 @@
         </p:blipFill>
         <p:spPr>
           <a:xfrm>
-            <a:off x="7824209" y="868680"/>
-            <a:ext cx="2029676" cy="4892040"/>
+            <a:off x="7955762" y="868680"/>
+            <a:ext cx="1766570" cy="4892040"/>
           </a:xfrm>
           <a:prstGeom prst="rect">
             <a:avLst/>

--- a/dittvin-cro-audit/dittvin-ecomhouse-pitch.pptx
+++ b/dittvin-cro-audit/dittvin-ecomhouse-pitch.pptx
@@ -37905,8 +37905,8 @@
         </p:blipFill>
         <p:spPr>
           <a:xfrm>
-            <a:off x="7955762" y="868680"/>
-            <a:ext cx="1766570" cy="4892040"/>
+            <a:off x="7941404" y="868680"/>
+            <a:ext cx="1795286" cy="4892040"/>
           </a:xfrm>
           <a:prstGeom prst="rect">
             <a:avLst/>
